--- a/Report_File/프레젠테이션1.pptx
+++ b/Report_File/프레젠테이션1.pptx
@@ -5995,6 +5995,152 @@
           </a:fontRef>
         </p:style>
       </p:cxnSp>
+      <p:pic>
+        <p:nvPicPr>
+          <p:cNvPr id="4" name="그림 3">
+            <a:extLst>
+              <a:ext uri="{FF2B5EF4-FFF2-40B4-BE49-F238E27FC236}">
+                <a16:creationId xmlns:a16="http://schemas.microsoft.com/office/drawing/2014/main" id="{43815886-57E7-8D8A-3636-F1222709EAD1}"/>
+              </a:ext>
+            </a:extLst>
+          </p:cNvPr>
+          <p:cNvPicPr>
+            <a:picLocks noChangeAspect="1"/>
+          </p:cNvPicPr>
+          <p:nvPr/>
+        </p:nvPicPr>
+        <p:blipFill>
+          <a:blip r:embed="rId5"/>
+          <a:stretch>
+            <a:fillRect/>
+          </a:stretch>
+        </p:blipFill>
+        <p:spPr>
+          <a:xfrm>
+            <a:off x="8286385" y="5635709"/>
+            <a:ext cx="3507661" cy="1043667"/>
+          </a:xfrm>
+          <a:prstGeom prst="rect">
+            <a:avLst/>
+          </a:prstGeom>
+          <a:solidFill>
+            <a:srgbClr val="FFFFFF">
+              <a:shade val="85000"/>
+            </a:srgbClr>
+          </a:solidFill>
+          <a:ln w="88900" cap="sq">
+            <a:solidFill>
+              <a:srgbClr val="FFFFFF"/>
+            </a:solidFill>
+            <a:miter lim="800000"/>
+          </a:ln>
+          <a:effectLst>
+            <a:outerShdw blurRad="55000" dist="18000" dir="5400000" algn="tl" rotWithShape="0">
+              <a:srgbClr val="000000">
+                <a:alpha val="40000"/>
+              </a:srgbClr>
+            </a:outerShdw>
+          </a:effectLst>
+          <a:scene3d>
+            <a:camera prst="orthographicFront"/>
+            <a:lightRig rig="twoPt" dir="t">
+              <a:rot lat="0" lon="0" rev="7200000"/>
+            </a:lightRig>
+          </a:scene3d>
+          <a:sp3d>
+            <a:bevelT w="25400" h="19050"/>
+            <a:contourClr>
+              <a:srgbClr val="FFFFFF"/>
+            </a:contourClr>
+          </a:sp3d>
+        </p:spPr>
+      </p:pic>
+      <p:sp>
+        <p:nvSpPr>
+          <p:cNvPr id="6" name="사각형: 둥근 모서리 5">
+            <a:extLst>
+              <a:ext uri="{FF2B5EF4-FFF2-40B4-BE49-F238E27FC236}">
+                <a16:creationId xmlns:a16="http://schemas.microsoft.com/office/drawing/2014/main" id="{89E06087-7A54-4B58-49AB-944002686D28}"/>
+              </a:ext>
+            </a:extLst>
+          </p:cNvPr>
+          <p:cNvSpPr/>
+          <p:nvPr/>
+        </p:nvSpPr>
+        <p:spPr>
+          <a:xfrm>
+            <a:off x="9641650" y="5128789"/>
+            <a:ext cx="2326740" cy="787651"/>
+          </a:xfrm>
+          <a:prstGeom prst="roundRect">
+            <a:avLst/>
+          </a:prstGeom>
+          <a:solidFill>
+            <a:schemeClr val="accent1">
+              <a:lumMod val="20000"/>
+              <a:lumOff val="80000"/>
+            </a:schemeClr>
+          </a:solidFill>
+          <a:ln>
+            <a:noFill/>
+          </a:ln>
+          <a:effectLst>
+            <a:outerShdw blurRad="190500" dist="228600" dir="2700000" algn="ctr">
+              <a:srgbClr val="000000">
+                <a:alpha val="30000"/>
+              </a:srgbClr>
+            </a:outerShdw>
+          </a:effectLst>
+          <a:scene3d>
+            <a:camera prst="orthographicFront">
+              <a:rot lat="0" lon="0" rev="0"/>
+            </a:camera>
+            <a:lightRig rig="glow" dir="t">
+              <a:rot lat="0" lon="0" rev="4800000"/>
+            </a:lightRig>
+          </a:scene3d>
+          <a:sp3d prstMaterial="matte">
+            <a:bevelT w="127000" h="63500"/>
+          </a:sp3d>
+        </p:spPr>
+        <p:style>
+          <a:lnRef idx="2">
+            <a:schemeClr val="dk1"/>
+          </a:lnRef>
+          <a:fillRef idx="1">
+            <a:schemeClr val="lt1"/>
+          </a:fillRef>
+          <a:effectRef idx="0">
+            <a:schemeClr val="dk1"/>
+          </a:effectRef>
+          <a:fontRef idx="minor">
+            <a:schemeClr val="dk1"/>
+          </a:fontRef>
+        </p:style>
+        <p:txBody>
+          <a:bodyPr rtlCol="0" anchor="ctr"/>
+          <a:lstStyle/>
+          <a:p>
+            <a:pPr algn="ctr"/>
+            <a:r>
+              <a:rPr lang="ko-KR" altLang="en-US" dirty="0"/>
+              <a:t>주차된 차량이 </a:t>
+            </a:r>
+            <a:br>
+              <a:rPr lang="en-US" altLang="ko-KR" dirty="0"/>
+            </a:br>
+            <a:r>
+              <a:rPr lang="ko-KR" altLang="en-US" dirty="0"/>
+              <a:t>아닐 시 </a:t>
+            </a:r>
+            <a:r>
+              <a:rPr lang="ko-KR" altLang="en-US" dirty="0" err="1"/>
+              <a:t>얼럿창</a:t>
+            </a:r>
+            <a:endParaRPr lang="ko-KR" altLang="en-US" dirty="0"/>
+          </a:p>
+        </p:txBody>
+      </p:sp>
     </p:spTree>
     <p:extLst>
       <p:ext uri="{BB962C8B-B14F-4D97-AF65-F5344CB8AC3E}">
@@ -7547,6 +7693,191 @@
           </a:fontRef>
         </p:style>
       </p:cxnSp>
+      <p:pic>
+        <p:nvPicPr>
+          <p:cNvPr id="4" name="그림 3">
+            <a:extLst>
+              <a:ext uri="{FF2B5EF4-FFF2-40B4-BE49-F238E27FC236}">
+                <a16:creationId xmlns:a16="http://schemas.microsoft.com/office/drawing/2014/main" id="{4CE94130-240E-9B5A-8020-8917563899B3}"/>
+              </a:ext>
+            </a:extLst>
+          </p:cNvPr>
+          <p:cNvPicPr>
+            <a:picLocks noChangeAspect="1"/>
+          </p:cNvPicPr>
+          <p:nvPr/>
+        </p:nvPicPr>
+        <p:blipFill>
+          <a:blip r:embed="rId6"/>
+          <a:stretch>
+            <a:fillRect/>
+          </a:stretch>
+        </p:blipFill>
+        <p:spPr>
+          <a:xfrm>
+            <a:off x="428625" y="3552319"/>
+            <a:ext cx="4388400" cy="1305721"/>
+          </a:xfrm>
+          <a:prstGeom prst="rect">
+            <a:avLst/>
+          </a:prstGeom>
+          <a:solidFill>
+            <a:srgbClr val="FFFFFF">
+              <a:shade val="85000"/>
+            </a:srgbClr>
+          </a:solidFill>
+          <a:ln w="88900" cap="sq">
+            <a:solidFill>
+              <a:srgbClr val="FFFFFF"/>
+            </a:solidFill>
+            <a:miter lim="800000"/>
+          </a:ln>
+          <a:effectLst>
+            <a:outerShdw blurRad="55000" dist="18000" dir="5400000" algn="tl" rotWithShape="0">
+              <a:srgbClr val="000000">
+                <a:alpha val="40000"/>
+              </a:srgbClr>
+            </a:outerShdw>
+          </a:effectLst>
+          <a:scene3d>
+            <a:camera prst="orthographicFront"/>
+            <a:lightRig rig="twoPt" dir="t">
+              <a:rot lat="0" lon="0" rev="7200000"/>
+            </a:lightRig>
+          </a:scene3d>
+          <a:sp3d>
+            <a:bevelT w="25400" h="19050"/>
+            <a:contourClr>
+              <a:srgbClr val="FFFFFF"/>
+            </a:contourClr>
+          </a:sp3d>
+        </p:spPr>
+      </p:pic>
+      <p:cxnSp>
+        <p:nvCxnSpPr>
+          <p:cNvPr id="7" name="직선 화살표 연결선 6">
+            <a:extLst>
+              <a:ext uri="{FF2B5EF4-FFF2-40B4-BE49-F238E27FC236}">
+                <a16:creationId xmlns:a16="http://schemas.microsoft.com/office/drawing/2014/main" id="{A79D7B9E-5529-D02D-F4FE-5A9DF21B4EEB}"/>
+              </a:ext>
+            </a:extLst>
+          </p:cNvPr>
+          <p:cNvCxnSpPr/>
+          <p:nvPr/>
+        </p:nvCxnSpPr>
+        <p:spPr>
+          <a:xfrm flipH="1">
+            <a:off x="3141552" y="2553077"/>
+            <a:ext cx="6762939" cy="1502875"/>
+          </a:xfrm>
+          <a:prstGeom prst="straightConnector1">
+            <a:avLst/>
+          </a:prstGeom>
+          <a:ln>
+            <a:tailEnd type="triangle"/>
+          </a:ln>
+        </p:spPr>
+        <p:style>
+          <a:lnRef idx="1">
+            <a:schemeClr val="accent1"/>
+          </a:lnRef>
+          <a:fillRef idx="0">
+            <a:schemeClr val="accent1"/>
+          </a:fillRef>
+          <a:effectRef idx="0">
+            <a:schemeClr val="accent1"/>
+          </a:effectRef>
+          <a:fontRef idx="minor">
+            <a:schemeClr val="tx1"/>
+          </a:fontRef>
+        </p:style>
+      </p:cxnSp>
+      <p:sp>
+        <p:nvSpPr>
+          <p:cNvPr id="9" name="사각형: 둥근 모서리 8">
+            <a:extLst>
+              <a:ext uri="{FF2B5EF4-FFF2-40B4-BE49-F238E27FC236}">
+                <a16:creationId xmlns:a16="http://schemas.microsoft.com/office/drawing/2014/main" id="{F5D21446-B3C1-52F0-1D58-B1D90F1BC9EC}"/>
+              </a:ext>
+            </a:extLst>
+          </p:cNvPr>
+          <p:cNvSpPr/>
+          <p:nvPr/>
+        </p:nvSpPr>
+        <p:spPr>
+          <a:xfrm>
+            <a:off x="1370187" y="4267543"/>
+            <a:ext cx="2326740" cy="787651"/>
+          </a:xfrm>
+          <a:prstGeom prst="roundRect">
+            <a:avLst/>
+          </a:prstGeom>
+          <a:solidFill>
+            <a:schemeClr val="accent1">
+              <a:lumMod val="20000"/>
+              <a:lumOff val="80000"/>
+            </a:schemeClr>
+          </a:solidFill>
+          <a:ln>
+            <a:noFill/>
+          </a:ln>
+          <a:effectLst>
+            <a:outerShdw blurRad="190500" dist="228600" dir="2700000" algn="ctr">
+              <a:srgbClr val="000000">
+                <a:alpha val="30000"/>
+              </a:srgbClr>
+            </a:outerShdw>
+          </a:effectLst>
+          <a:scene3d>
+            <a:camera prst="orthographicFront">
+              <a:rot lat="0" lon="0" rev="0"/>
+            </a:camera>
+            <a:lightRig rig="glow" dir="t">
+              <a:rot lat="0" lon="0" rev="4800000"/>
+            </a:lightRig>
+          </a:scene3d>
+          <a:sp3d prstMaterial="matte">
+            <a:bevelT w="127000" h="63500"/>
+          </a:sp3d>
+        </p:spPr>
+        <p:style>
+          <a:lnRef idx="2">
+            <a:schemeClr val="dk1"/>
+          </a:lnRef>
+          <a:fillRef idx="1">
+            <a:schemeClr val="lt1"/>
+          </a:fillRef>
+          <a:effectRef idx="0">
+            <a:schemeClr val="dk1"/>
+          </a:effectRef>
+          <a:fontRef idx="minor">
+            <a:schemeClr val="dk1"/>
+          </a:fontRef>
+        </p:style>
+        <p:txBody>
+          <a:bodyPr rtlCol="0" anchor="ctr"/>
+          <a:lstStyle/>
+          <a:p>
+            <a:pPr algn="ctr"/>
+            <a:r>
+              <a:rPr lang="ko-KR" altLang="en-US" dirty="0"/>
+              <a:t>주차된 차량이 </a:t>
+            </a:r>
+            <a:br>
+              <a:rPr lang="en-US" altLang="ko-KR" dirty="0"/>
+            </a:br>
+            <a:r>
+              <a:rPr lang="ko-KR" altLang="en-US" dirty="0"/>
+              <a:t>아닐 시 </a:t>
+            </a:r>
+            <a:r>
+              <a:rPr lang="ko-KR" altLang="en-US" dirty="0" err="1"/>
+              <a:t>얼럿창</a:t>
+            </a:r>
+            <a:endParaRPr lang="ko-KR" altLang="en-US" dirty="0"/>
+          </a:p>
+        </p:txBody>
+      </p:sp>
     </p:spTree>
     <p:extLst>
       <p:ext uri="{BB962C8B-B14F-4D97-AF65-F5344CB8AC3E}">
